--- a/HTML_CSS/PowerPointSlides/Chapter 2 slides.pptx
+++ b/HTML_CSS/PowerPointSlides/Chapter 2 slides.pptx
@@ -5939,7 +5939,7 @@
               </a14:hiddenLine>
             </a:ext>
             <a:ext uri="{FAA26D3D-D897-4be2-8F04-BA451C77F1D7}">
-              <ma14:placeholderFlag xmlns="" xmlns:ma14="http://schemas.microsoft.com/office/mac/drawingml/2011/main" val="1"/>
+              <ma14:placeholderFlag xmlns:ma14="http://schemas.microsoft.com/office/mac/drawingml/2011/main" xmlns="" val="1"/>
             </a:ext>
           </a:extLst>
         </p:spPr>
@@ -6003,7 +6003,7 @@
               </a14:hiddenLine>
             </a:ext>
             <a:ext uri="{FAA26D3D-D897-4be2-8F04-BA451C77F1D7}">
-              <ma14:placeholderFlag xmlns="" xmlns:ma14="http://schemas.microsoft.com/office/mac/drawingml/2011/main" val="1"/>
+              <ma14:placeholderFlag xmlns:ma14="http://schemas.microsoft.com/office/mac/drawingml/2011/main" xmlns="" val="1"/>
             </a:ext>
           </a:extLst>
         </p:spPr>
@@ -11767,14 +11767,14 @@
             <p:ph idx="1"/>
             <p:extLst>
               <p:ext uri="{D42A27DB-BD31-4B8C-83A1-F6EECF244321}">
-                <p14:modId xmlns:p14="http://schemas.microsoft.com/office/powerpoint/2010/main" val="631370664"/>
+                <p14:modId xmlns:p14="http://schemas.microsoft.com/office/powerpoint/2010/main" val="437616886"/>
               </p:ext>
             </p:extLst>
           </p:nvPr>
         </p:nvGraphicFramePr>
         <p:xfrm>
           <a:off x="628650" y="1740067"/>
-          <a:ext cx="7886700" cy="3250579"/>
+          <a:ext cx="7886700" cy="3277321"/>
         </p:xfrm>
         <a:graphic>
           <a:graphicData uri="http://schemas.openxmlformats.org/drawingml/2006/table">
@@ -11810,7 +11810,7 @@
                   </a:extLst>
                 </a:gridCol>
               </a:tblGrid>
-              <a:tr h="671591">
+              <a:tr h="698333">
                 <a:tc>
                   <a:txBody>
                     <a:bodyPr/>
